--- a/exports/pptx/lessons/senior-module-05-dot-addition/day-07-discussion.pptx
+++ b/exports/pptx/lessons/senior-module-05-dot-addition/day-07-discussion.pptx
@@ -15,9 +15,11 @@
     <p:sldId id="263" r:id="rId9"/>
     <p:sldId id="264" r:id="rId10"/>
     <p:sldId id="265" r:id="rId11"/>
+    <p:sldId id="266" r:id="rId12"/>
+    <p:sldId id="267" r:id="rId13"/>
   </p:sldIdLst>
   <p:notesMasterIdLst>
-    <p:notesMasterId r:id="rId12"/>
+    <p:notesMasterId r:id="rId14"/>
   </p:notesMasterIdLst>
   <p:sldSz cx="9144000" cy="5143500"/>
   <p:notesSz cx="5143500" cy="9144000"/>
@@ -623,6 +625,182 @@
             <a:fld id="{F7021451-1387-4CA6-816F-3879F97B5CBC}" type="slidenum">
               <a:rPr lang="en-US"/>
               <a:t>10</a:t>
+            </a:fld>
+            <a:endParaRPr lang="en-US"/>
+          </a:p>
+        </p:txBody>
+      </p:sp>
+    </p:spTree>
+    <p:extLst>
+      <p:ext uri="{BB962C8B-B14F-4D97-AF65-F5344CB8AC3E}">
+        <p14:creationId xmlns:p14="http://schemas.microsoft.com/office/powerpoint/2010/main" val="1024086991"/>
+      </p:ext>
+    </p:extLst>
+  </p:cSld>
+  <p:clrMapOvr>
+    <a:masterClrMapping/>
+  </p:clrMapOvr>
+</p:notes>
+</file>
+
+<file path=ppt/notesSlides/notesSlide11.xml><?xml version="1.0" encoding="utf-8"?>
+<p:notes xmlns:a="http://schemas.openxmlformats.org/drawingml/2006/main" xmlns:r="http://schemas.openxmlformats.org/officeDocument/2006/relationships" xmlns:p="http://schemas.openxmlformats.org/presentationml/2006/main">
+  <p:cSld>
+    <p:spTree>
+      <p:nvGrpSpPr>
+        <p:cNvPr id="1" name=""/>
+        <p:cNvGrpSpPr/>
+        <p:nvPr/>
+      </p:nvGrpSpPr>
+      <p:grpSpPr>
+        <a:xfrm>
+          <a:off x="0" y="0"/>
+          <a:ext cx="0" cy="0"/>
+          <a:chOff x="0" y="0"/>
+          <a:chExt cx="0" cy="0"/>
+        </a:xfrm>
+      </p:grpSpPr>
+      <p:sp>
+        <p:nvSpPr>
+          <p:cNvPr id="2" name="Slide Image Placeholder 1"/>
+          <p:cNvSpPr>
+            <a:spLocks noGrp="1" noRot="1" noChangeAspect="1"/>
+          </p:cNvSpPr>
+          <p:nvPr>
+            <p:ph type="sldImg"/>
+          </p:nvPr>
+        </p:nvSpPr>
+        <p:spPr/>
+      </p:sp>
+      <p:sp>
+        <p:nvSpPr>
+          <p:cNvPr id="3" name="Notes Placeholder 2"/>
+          <p:cNvSpPr>
+            <a:spLocks noGrp="1"/>
+          </p:cNvSpPr>
+          <p:nvPr>
+            <p:ph type="body" idx="1"/>
+          </p:nvPr>
+        </p:nvSpPr>
+        <p:spPr/>
+        <p:txBody>
+          <a:bodyPr/>
+          <a:lstStyle/>
+          <a:p>
+            <a:r>
+              <a:rPr lang="en-US" dirty="0"/>
+              <a:t/>
+            </a:r>
+            <a:endParaRPr lang="en-US" dirty="0"/>
+          </a:p>
+        </p:txBody>
+      </p:sp>
+      <p:sp>
+        <p:nvSpPr>
+          <p:cNvPr id="4" name="Slide Number Placeholder 3"/>
+          <p:cNvSpPr>
+            <a:spLocks noGrp="1"/>
+          </p:cNvSpPr>
+          <p:nvPr>
+            <p:ph type="sldNum" sz="quarter" idx="10"/>
+          </p:nvPr>
+        </p:nvSpPr>
+        <p:spPr/>
+        <p:txBody>
+          <a:bodyPr/>
+          <a:lstStyle/>
+          <a:p>
+            <a:fld id="{F7021451-1387-4CA6-816F-3879F97B5CBC}" type="slidenum">
+              <a:rPr lang="en-US"/>
+              <a:t>11</a:t>
+            </a:fld>
+            <a:endParaRPr lang="en-US"/>
+          </a:p>
+        </p:txBody>
+      </p:sp>
+    </p:spTree>
+    <p:extLst>
+      <p:ext uri="{BB962C8B-B14F-4D97-AF65-F5344CB8AC3E}">
+        <p14:creationId xmlns:p14="http://schemas.microsoft.com/office/powerpoint/2010/main" val="1024086991"/>
+      </p:ext>
+    </p:extLst>
+  </p:cSld>
+  <p:clrMapOvr>
+    <a:masterClrMapping/>
+  </p:clrMapOvr>
+</p:notes>
+</file>
+
+<file path=ppt/notesSlides/notesSlide12.xml><?xml version="1.0" encoding="utf-8"?>
+<p:notes xmlns:a="http://schemas.openxmlformats.org/drawingml/2006/main" xmlns:r="http://schemas.openxmlformats.org/officeDocument/2006/relationships" xmlns:p="http://schemas.openxmlformats.org/presentationml/2006/main">
+  <p:cSld>
+    <p:spTree>
+      <p:nvGrpSpPr>
+        <p:cNvPr id="1" name=""/>
+        <p:cNvGrpSpPr/>
+        <p:nvPr/>
+      </p:nvGrpSpPr>
+      <p:grpSpPr>
+        <a:xfrm>
+          <a:off x="0" y="0"/>
+          <a:ext cx="0" cy="0"/>
+          <a:chOff x="0" y="0"/>
+          <a:chExt cx="0" cy="0"/>
+        </a:xfrm>
+      </p:grpSpPr>
+      <p:sp>
+        <p:nvSpPr>
+          <p:cNvPr id="2" name="Slide Image Placeholder 1"/>
+          <p:cNvSpPr>
+            <a:spLocks noGrp="1" noRot="1" noChangeAspect="1"/>
+          </p:cNvSpPr>
+          <p:nvPr>
+            <p:ph type="sldImg"/>
+          </p:nvPr>
+        </p:nvSpPr>
+        <p:spPr/>
+      </p:sp>
+      <p:sp>
+        <p:nvSpPr>
+          <p:cNvPr id="3" name="Notes Placeholder 2"/>
+          <p:cNvSpPr>
+            <a:spLocks noGrp="1"/>
+          </p:cNvSpPr>
+          <p:nvPr>
+            <p:ph type="body" idx="1"/>
+          </p:nvPr>
+        </p:nvSpPr>
+        <p:spPr/>
+        <p:txBody>
+          <a:bodyPr/>
+          <a:lstStyle/>
+          <a:p>
+            <a:r>
+              <a:rPr lang="en-US" dirty="0"/>
+              <a:t/>
+            </a:r>
+            <a:endParaRPr lang="en-US" dirty="0"/>
+          </a:p>
+        </p:txBody>
+      </p:sp>
+      <p:sp>
+        <p:nvSpPr>
+          <p:cNvPr id="4" name="Slide Number Placeholder 3"/>
+          <p:cNvSpPr>
+            <a:spLocks noGrp="1"/>
+          </p:cNvSpPr>
+          <p:nvPr>
+            <p:ph type="sldNum" sz="quarter" idx="10"/>
+          </p:nvPr>
+        </p:nvSpPr>
+        <p:spPr/>
+        <p:txBody>
+          <a:bodyPr/>
+          <a:lstStyle/>
+          <a:p>
+            <a:fld id="{F7021451-1387-4CA6-816F-3879F97B5CBC}" type="slidenum">
+              <a:rPr lang="en-US"/>
+              <a:t>12</a:t>
             </a:fld>
             <a:endParaRPr lang="en-US"/>
           </a:p>
@@ -1876,102 +2054,6 @@
         </p:nvSpPr>
         <p:spPr>
           <a:xfrm>
-            <a:off x="406301" y="1574453"/>
-            <a:ext cx="8498026" cy="274290"/>
-          </a:xfrm>
-          <a:prstGeom prst="rect">
-            <a:avLst/>
-          </a:prstGeom>
-          <a:noFill/>
-          <a:ln/>
-        </p:spPr>
-        <p:txBody>
-          <a:bodyPr wrap="square" lIns="0" tIns="0" rIns="0" bIns="0" rtlCol="0" anchor="t"/>
-          <a:lstStyle/>
-          <a:p>
-            <a:pPr algn="l" indent="0" marL="0">
-              <a:lnSpc>
-                <a:spcPts val="2160"/>
-              </a:lnSpc>
-              <a:spcBef>
-                <a:spcPts val="600"/>
-              </a:spcBef>
-              <a:spcAft>
-                <a:spcPts val="800"/>
-              </a:spcAft>
-              <a:buNone/>
-            </a:pPr>
-            <a:r>
-              <a:rPr lang="en-US" sz="1800" b="1" dirty="0">
-                <a:solidFill>
-                  <a:srgbClr val="997929"/>
-                </a:solidFill>
-                <a:latin typeface="Times New Roman" pitchFamily="34" charset="0"/>
-                <a:ea typeface="Times New Roman" pitchFamily="34" charset="-122"/>
-                <a:cs typeface="Times New Roman" pitchFamily="34" charset="-120"/>
-              </a:rPr>
-              <a:t>Learning objective</a:t>
-            </a:r>
-            <a:endParaRPr lang="en-US" sz="1800" dirty="0"/>
-          </a:p>
-        </p:txBody>
-      </p:sp>
-      <p:sp>
-        <p:nvSpPr>
-          <p:cNvPr id="6" name="Text 4"/>
-          <p:cNvSpPr/>
-          <p:nvPr/>
-        </p:nvSpPr>
-        <p:spPr>
-          <a:xfrm>
-            <a:off x="406301" y="1988344"/>
-            <a:ext cx="8498026" cy="213271"/>
-          </a:xfrm>
-          <a:prstGeom prst="rect">
-            <a:avLst/>
-          </a:prstGeom>
-          <a:noFill/>
-          <a:ln/>
-        </p:spPr>
-        <p:txBody>
-          <a:bodyPr wrap="square" lIns="0" tIns="0" rIns="0" bIns="0" rtlCol="0" anchor="t"/>
-          <a:lstStyle/>
-          <a:p>
-            <a:pPr algn="l" indent="0" marL="0">
-              <a:lnSpc>
-                <a:spcPts val="1680"/>
-              </a:lnSpc>
-              <a:spcBef>
-                <a:spcPts val="300"/>
-              </a:spcBef>
-              <a:spcAft>
-                <a:spcPts val="300"/>
-              </a:spcAft>
-              <a:buNone/>
-            </a:pPr>
-            <a:r>
-              <a:rPr lang="en-US" sz="1200" dirty="0">
-                <a:solidFill>
-                  <a:srgbClr val="1A1A1A"/>
-                </a:solidFill>
-                <a:latin typeface="Georgia" pitchFamily="34" charset="0"/>
-                <a:ea typeface="Georgia" pitchFamily="34" charset="-122"/>
-                <a:cs typeface="Georgia" pitchFamily="34" charset="-120"/>
-              </a:rPr>
-              <a:t>Students articulate and defend a labelling position with at least one citation and one steel-manned counter.</a:t>
-            </a:r>
-            <a:endParaRPr lang="en-US" sz="1200" dirty="0"/>
-          </a:p>
-        </p:txBody>
-      </p:sp>
-      <p:sp>
-        <p:nvSpPr>
-          <p:cNvPr id="7" name="Text 5"/>
-          <p:cNvSpPr/>
-          <p:nvPr/>
-        </p:nvSpPr>
-        <p:spPr>
-          <a:xfrm>
             <a:off x="406301" y="4434929"/>
             <a:ext cx="8498026" cy="213271"/>
           </a:xfrm>
@@ -2116,7 +2198,7 @@
                 <a:ea typeface="Times New Roman" pitchFamily="34" charset="-122"/>
                 <a:cs typeface="Times New Roman" pitchFamily="34" charset="-120"/>
               </a:rPr>
-              <a:t>Citation(s) used</a:t>
+              <a:t>Differentiation</a:t>
             </a:r>
             <a:endParaRPr lang="en-US" sz="1800" dirty="0"/>
           </a:p>
@@ -2130,8 +2212,8 @@
         </p:nvSpPr>
         <p:spPr>
           <a:xfrm>
-            <a:off x="406301" y="870942"/>
-            <a:ext cx="8498026" cy="213271"/>
+            <a:off x="634901" y="883593"/>
+            <a:ext cx="8102798" cy="525661"/>
           </a:xfrm>
           <a:prstGeom prst="rect">
             <a:avLst/>
@@ -2143,20 +2225,18 @@
           <a:bodyPr wrap="square" lIns="0" tIns="0" rIns="0" bIns="0" rtlCol="0" anchor="t"/>
           <a:lstStyle/>
           <a:p>
-            <a:pPr algn="l" indent="0" marL="0">
-              <a:lnSpc>
-                <a:spcPts val="1680"/>
-              </a:lnSpc>
-              <a:spcBef>
-                <a:spcPts val="300"/>
-              </a:spcBef>
-              <a:spcAft>
-                <a:spcPts val="300"/>
-              </a:spcAft>
-              <a:buNone/>
-            </a:pPr>
-            <a:r>
-              <a:rPr lang="en-US" sz="1200" dirty="0">
+            <a:pPr algn="l" marL="342900" indent="-342900">
+              <a:lnSpc>
+                <a:spcPts val="1620"/>
+              </a:lnSpc>
+              <a:spcAft>
+                <a:spcPts val="300"/>
+              </a:spcAft>
+              <a:buSzPct val="100000"/>
+              <a:buChar char="•"/>
+            </a:pPr>
+            <a:r>
+              <a:rPr lang="en-US" sz="1200" b="1" dirty="0">
                 <a:solidFill>
                   <a:srgbClr val="1A1A1A"/>
                 </a:solidFill>
@@ -2164,7 +2244,551 @@
                 <a:ea typeface="Georgia" pitchFamily="34" charset="-122"/>
                 <a:cs typeface="Georgia" pitchFamily="34" charset="-120"/>
               </a:rPr>
-              <a:t>– Tirthaji (1965), Preface. – Dani (1993). – Plofker (2009) optional.</a:t>
+              <a:t>Tier up:</a:t>
+            </a:r>
+            <a:pPr algn="l" indent="0" marL="0">
+              <a:lnSpc>
+                <a:spcPts val="1620"/>
+              </a:lnSpc>
+              <a:spcAft>
+                <a:spcPts val="300"/>
+              </a:spcAft>
+              <a:buNone/>
+            </a:pPr>
+            <a:r>
+              <a:rPr lang="en-US" sz="1200" dirty="0">
+                <a:solidFill>
+                  <a:srgbClr val="1A1A1A"/>
+                </a:solidFill>
+                <a:latin typeface="Georgia" pitchFamily="34" charset="0"/>
+                <a:ea typeface="Georgia" pitchFamily="34" charset="-122"/>
+                <a:cs typeface="Georgia" pitchFamily="34" charset="-120"/>
+              </a:rPr>
+              <a:t> Take a position you DON'T agree with. Defend it.</a:t>
+            </a:r>
+            <a:endParaRPr lang="en-US" sz="1200" dirty="0"/>
+          </a:p>
+          <a:p>
+            <a:pPr algn="l" marL="342900" indent="-342900">
+              <a:lnSpc>
+                <a:spcPts val="1620"/>
+              </a:lnSpc>
+              <a:spcAft>
+                <a:spcPts val="300"/>
+              </a:spcAft>
+              <a:buSzPct val="100000"/>
+              <a:buChar char="•"/>
+            </a:pPr>
+            <a:r>
+              <a:rPr lang="en-US" sz="1200" b="1" dirty="0">
+                <a:solidFill>
+                  <a:srgbClr val="1A1A1A"/>
+                </a:solidFill>
+                <a:latin typeface="Georgia" pitchFamily="34" charset="0"/>
+                <a:ea typeface="Georgia" pitchFamily="34" charset="-122"/>
+                <a:cs typeface="Georgia" pitchFamily="34" charset="-120"/>
+              </a:rPr>
+              <a:t>Tier down:</a:t>
+            </a:r>
+            <a:pPr algn="l" indent="0" marL="0">
+              <a:lnSpc>
+                <a:spcPts val="1620"/>
+              </a:lnSpc>
+              <a:spcAft>
+                <a:spcPts val="300"/>
+              </a:spcAft>
+              <a:buNone/>
+            </a:pPr>
+            <a:r>
+              <a:rPr lang="en-US" sz="1200" dirty="0">
+                <a:solidFill>
+                  <a:srgbClr val="1A1A1A"/>
+                </a:solidFill>
+                <a:latin typeface="Georgia" pitchFamily="34" charset="0"/>
+                <a:ea typeface="Georgia" pitchFamily="34" charset="-122"/>
+                <a:cs typeface="Georgia" pitchFamily="34" charset="-120"/>
+              </a:rPr>
+              <a:t> Use your Day 6 reading response as your speaking notes.</a:t>
+            </a:r>
+            <a:endParaRPr lang="en-US" sz="1200" dirty="0"/>
+          </a:p>
+        </p:txBody>
+      </p:sp>
+      <p:sp>
+        <p:nvSpPr>
+          <p:cNvPr id="5" name="Text 3"/>
+          <p:cNvSpPr/>
+          <p:nvPr/>
+        </p:nvSpPr>
+        <p:spPr>
+          <a:xfrm>
+            <a:off x="406301" y="4434929"/>
+            <a:ext cx="8498026" cy="213271"/>
+          </a:xfrm>
+          <a:prstGeom prst="rect">
+            <a:avLst/>
+          </a:prstGeom>
+          <a:noFill/>
+          <a:ln/>
+        </p:spPr>
+        <p:txBody>
+          <a:bodyPr wrap="square" lIns="0" tIns="0" rIns="0" bIns="0" rtlCol="0" anchor="t"/>
+          <a:lstStyle/>
+          <a:p>
+            <a:pPr algn="l" indent="0" marL="0">
+              <a:lnSpc>
+                <a:spcPts val="1680"/>
+              </a:lnSpc>
+              <a:spcBef>
+                <a:spcPts val="300"/>
+              </a:spcBef>
+              <a:spcAft>
+                <a:spcPts val="300"/>
+              </a:spcAft>
+              <a:buNone/>
+            </a:pPr>
+            <a:r>
+              <a:rPr lang="en-US" sz="1200" dirty="0">
+                <a:solidFill>
+                  <a:srgbClr val="1A1A1A"/>
+                </a:solidFill>
+                <a:latin typeface="Georgia" pitchFamily="34" charset="0"/>
+                <a:ea typeface="Georgia" pitchFamily="34" charset="-122"/>
+                <a:cs typeface="Georgia" pitchFamily="34" charset="-120"/>
+              </a:rPr>
+              <a:t>Senior ·  · IKS Curriculum</a:t>
+            </a:r>
+            <a:endParaRPr lang="en-US" sz="1200" dirty="0"/>
+          </a:p>
+        </p:txBody>
+      </p:sp>
+    </p:spTree>
+  </p:cSld>
+  <p:clrMapOvr>
+    <a:masterClrMapping/>
+  </p:clrMapOvr>
+</p:sld>
+</file>
+
+<file path=ppt/slides/slide11.xml><?xml version="1.0" encoding="utf-8"?>
+<p:sld xmlns:a="http://schemas.openxmlformats.org/drawingml/2006/main" xmlns:r="http://schemas.openxmlformats.org/officeDocument/2006/relationships" xmlns:p="http://schemas.openxmlformats.org/presentationml/2006/main">
+  <p:cSld name="Slide 11">
+    <p:bg>
+      <p:bgPr>
+        <a:solidFill>
+          <a:srgbClr val="FAF7F2"/>
+        </a:solidFill>
+      </p:bgPr>
+    </p:bg>
+    <p:spTree>
+      <p:nvGrpSpPr>
+        <p:cNvPr id="1" name=""/>
+        <p:cNvGrpSpPr/>
+        <p:nvPr/>
+      </p:nvGrpSpPr>
+      <p:grpSpPr>
+        <a:xfrm>
+          <a:off x="0" y="0"/>
+          <a:ext cx="0" cy="0"/>
+          <a:chOff x="0" y="0"/>
+          <a:chExt cx="0" cy="0"/>
+        </a:xfrm>
+      </p:grpSpPr>
+      <p:sp>
+        <p:nvSpPr>
+          <p:cNvPr id="2" name="Text 0"/>
+          <p:cNvSpPr/>
+          <p:nvPr/>
+        </p:nvSpPr>
+        <p:spPr>
+          <a:xfrm>
+            <a:off x="0" y="0"/>
+            <a:ext cx="9144000" cy="101501"/>
+          </a:xfrm>
+          <a:prstGeom prst="rect">
+            <a:avLst/>
+          </a:prstGeom>
+          <a:solidFill>
+            <a:srgbClr val="5D1D2E"/>
+          </a:solidFill>
+          <a:ln/>
+        </p:spPr>
+        <p:txBody>
+          <a:bodyPr wrap="square" rtlCol="0" anchor="ctr"/>
+          <a:lstStyle/>
+          <a:p>
+            <a:pPr indent="0" marL="0">
+              <a:buNone/>
+            </a:pPr>
+            <a:endParaRPr lang="en-US" dirty="0"/>
+          </a:p>
+        </p:txBody>
+      </p:sp>
+      <p:sp>
+        <p:nvSpPr>
+          <p:cNvPr id="3" name="Text 1"/>
+          <p:cNvSpPr/>
+          <p:nvPr/>
+        </p:nvSpPr>
+        <p:spPr>
+          <a:xfrm>
+            <a:off x="406301" y="457051"/>
+            <a:ext cx="8498026" cy="274290"/>
+          </a:xfrm>
+          <a:prstGeom prst="rect">
+            <a:avLst/>
+          </a:prstGeom>
+          <a:noFill/>
+          <a:ln/>
+        </p:spPr>
+        <p:txBody>
+          <a:bodyPr wrap="square" lIns="0" tIns="0" rIns="0" bIns="0" rtlCol="0" anchor="t"/>
+          <a:lstStyle/>
+          <a:p>
+            <a:pPr algn="l" indent="0" marL="0">
+              <a:lnSpc>
+                <a:spcPts val="2160"/>
+              </a:lnSpc>
+              <a:spcBef>
+                <a:spcPts val="600"/>
+              </a:spcBef>
+              <a:spcAft>
+                <a:spcPts val="800"/>
+              </a:spcAft>
+              <a:buNone/>
+            </a:pPr>
+            <a:r>
+              <a:rPr lang="en-US" sz="1800" b="1" dirty="0">
+                <a:solidFill>
+                  <a:srgbClr val="997929"/>
+                </a:solidFill>
+                <a:latin typeface="Times New Roman" pitchFamily="34" charset="0"/>
+                <a:ea typeface="Times New Roman" pitchFamily="34" charset="-122"/>
+                <a:cs typeface="Times New Roman" pitchFamily="34" charset="-120"/>
+              </a:rPr>
+              <a:t>Teacher notes</a:t>
+            </a:r>
+            <a:endParaRPr lang="en-US" sz="1800" dirty="0"/>
+          </a:p>
+        </p:txBody>
+      </p:sp>
+      <p:sp>
+        <p:nvSpPr>
+          <p:cNvPr id="4" name="Text 2"/>
+          <p:cNvSpPr/>
+          <p:nvPr/>
+        </p:nvSpPr>
+        <p:spPr>
+          <a:xfrm>
+            <a:off x="634901" y="883593"/>
+            <a:ext cx="8102798" cy="731341"/>
+          </a:xfrm>
+          <a:prstGeom prst="rect">
+            <a:avLst/>
+          </a:prstGeom>
+          <a:noFill/>
+          <a:ln/>
+        </p:spPr>
+        <p:txBody>
+          <a:bodyPr wrap="square" lIns="0" tIns="0" rIns="0" bIns="0" rtlCol="0" anchor="t"/>
+          <a:lstStyle/>
+          <a:p>
+            <a:pPr algn="l" marL="342900" indent="-342900">
+              <a:lnSpc>
+                <a:spcPts val="1620"/>
+              </a:lnSpc>
+              <a:spcAft>
+                <a:spcPts val="300"/>
+              </a:spcAft>
+              <a:buSzPct val="100000"/>
+              <a:buChar char="•"/>
+            </a:pPr>
+            <a:r>
+              <a:rPr lang="en-US" sz="1200" dirty="0">
+                <a:solidFill>
+                  <a:srgbClr val="1A1A1A"/>
+                </a:solidFill>
+                <a:latin typeface="Georgia" pitchFamily="34" charset="0"/>
+                <a:ea typeface="Georgia" pitchFamily="34" charset="-122"/>
+                <a:cs typeface="Georgia" pitchFamily="34" charset="-120"/>
+              </a:rPr>
+              <a:t>This debate is more politically loaded than the Module 2 debate. Some students' families have strong feelings. Model respect.</a:t>
+            </a:r>
+            <a:endParaRPr lang="en-US" sz="1200" dirty="0"/>
+          </a:p>
+          <a:p>
+            <a:pPr algn="l" marL="342900" indent="-342900">
+              <a:lnSpc>
+                <a:spcPts val="1620"/>
+              </a:lnSpc>
+              <a:spcAft>
+                <a:spcPts val="300"/>
+              </a:spcAft>
+              <a:buSzPct val="100000"/>
+              <a:buChar char="•"/>
+            </a:pPr>
+            <a:r>
+              <a:rPr lang="en-US" sz="1200" dirty="0">
+                <a:solidFill>
+                  <a:srgbClr val="1A1A1A"/>
+                </a:solidFill>
+                <a:latin typeface="Georgia" pitchFamily="34" charset="0"/>
+                <a:ea typeface="Georgia" pitchFamily="34" charset="-122"/>
+                <a:cs typeface="Georgia" pitchFamily="34" charset="-120"/>
+              </a:rPr>
+              <a:t>The "Position C" hybrid is often the strongest scholarly position — but defend it on its merits, not as a compromise.</a:t>
+            </a:r>
+            <a:endParaRPr lang="en-US" sz="1200" dirty="0"/>
+          </a:p>
+        </p:txBody>
+      </p:sp>
+      <p:sp>
+        <p:nvSpPr>
+          <p:cNvPr id="5" name="Text 3"/>
+          <p:cNvSpPr/>
+          <p:nvPr/>
+        </p:nvSpPr>
+        <p:spPr>
+          <a:xfrm>
+            <a:off x="406301" y="4434929"/>
+            <a:ext cx="8498026" cy="213271"/>
+          </a:xfrm>
+          <a:prstGeom prst="rect">
+            <a:avLst/>
+          </a:prstGeom>
+          <a:noFill/>
+          <a:ln/>
+        </p:spPr>
+        <p:txBody>
+          <a:bodyPr wrap="square" lIns="0" tIns="0" rIns="0" bIns="0" rtlCol="0" anchor="t"/>
+          <a:lstStyle/>
+          <a:p>
+            <a:pPr algn="l" indent="0" marL="0">
+              <a:lnSpc>
+                <a:spcPts val="1680"/>
+              </a:lnSpc>
+              <a:spcBef>
+                <a:spcPts val="300"/>
+              </a:spcBef>
+              <a:spcAft>
+                <a:spcPts val="300"/>
+              </a:spcAft>
+              <a:buNone/>
+            </a:pPr>
+            <a:r>
+              <a:rPr lang="en-US" sz="1200" dirty="0">
+                <a:solidFill>
+                  <a:srgbClr val="1A1A1A"/>
+                </a:solidFill>
+                <a:latin typeface="Georgia" pitchFamily="34" charset="0"/>
+                <a:ea typeface="Georgia" pitchFamily="34" charset="-122"/>
+                <a:cs typeface="Georgia" pitchFamily="34" charset="-120"/>
+              </a:rPr>
+              <a:t>Senior ·  · IKS Curriculum</a:t>
+            </a:r>
+            <a:endParaRPr lang="en-US" sz="1200" dirty="0"/>
+          </a:p>
+        </p:txBody>
+      </p:sp>
+    </p:spTree>
+  </p:cSld>
+  <p:clrMapOvr>
+    <a:masterClrMapping/>
+  </p:clrMapOvr>
+</p:sld>
+</file>
+
+<file path=ppt/slides/slide12.xml><?xml version="1.0" encoding="utf-8"?>
+<p:sld xmlns:a="http://schemas.openxmlformats.org/drawingml/2006/main" xmlns:r="http://schemas.openxmlformats.org/officeDocument/2006/relationships" xmlns:p="http://schemas.openxmlformats.org/presentationml/2006/main">
+  <p:cSld name="Slide 12">
+    <p:bg>
+      <p:bgPr>
+        <a:solidFill>
+          <a:srgbClr val="FAF7F2"/>
+        </a:solidFill>
+      </p:bgPr>
+    </p:bg>
+    <p:spTree>
+      <p:nvGrpSpPr>
+        <p:cNvPr id="1" name=""/>
+        <p:cNvGrpSpPr/>
+        <p:nvPr/>
+      </p:nvGrpSpPr>
+      <p:grpSpPr>
+        <a:xfrm>
+          <a:off x="0" y="0"/>
+          <a:ext cx="0" cy="0"/>
+          <a:chOff x="0" y="0"/>
+          <a:chExt cx="0" cy="0"/>
+        </a:xfrm>
+      </p:grpSpPr>
+      <p:sp>
+        <p:nvSpPr>
+          <p:cNvPr id="2" name="Text 0"/>
+          <p:cNvSpPr/>
+          <p:nvPr/>
+        </p:nvSpPr>
+        <p:spPr>
+          <a:xfrm>
+            <a:off x="0" y="0"/>
+            <a:ext cx="9144000" cy="101501"/>
+          </a:xfrm>
+          <a:prstGeom prst="rect">
+            <a:avLst/>
+          </a:prstGeom>
+          <a:solidFill>
+            <a:srgbClr val="5D1D2E"/>
+          </a:solidFill>
+          <a:ln/>
+        </p:spPr>
+        <p:txBody>
+          <a:bodyPr wrap="square" rtlCol="0" anchor="ctr"/>
+          <a:lstStyle/>
+          <a:p>
+            <a:pPr indent="0" marL="0">
+              <a:buNone/>
+            </a:pPr>
+            <a:endParaRPr lang="en-US" dirty="0"/>
+          </a:p>
+        </p:txBody>
+      </p:sp>
+      <p:sp>
+        <p:nvSpPr>
+          <p:cNvPr id="3" name="Text 1"/>
+          <p:cNvSpPr/>
+          <p:nvPr/>
+        </p:nvSpPr>
+        <p:spPr>
+          <a:xfrm>
+            <a:off x="406301" y="457051"/>
+            <a:ext cx="8498026" cy="274290"/>
+          </a:xfrm>
+          <a:prstGeom prst="rect">
+            <a:avLst/>
+          </a:prstGeom>
+          <a:noFill/>
+          <a:ln/>
+        </p:spPr>
+        <p:txBody>
+          <a:bodyPr wrap="square" lIns="0" tIns="0" rIns="0" bIns="0" rtlCol="0" anchor="t"/>
+          <a:lstStyle/>
+          <a:p>
+            <a:pPr algn="l" indent="0" marL="0">
+              <a:lnSpc>
+                <a:spcPts val="2160"/>
+              </a:lnSpc>
+              <a:spcBef>
+                <a:spcPts val="600"/>
+              </a:spcBef>
+              <a:spcAft>
+                <a:spcPts val="800"/>
+              </a:spcAft>
+              <a:buNone/>
+            </a:pPr>
+            <a:r>
+              <a:rPr lang="en-US" sz="1800" b="1" dirty="0">
+                <a:solidFill>
+                  <a:srgbClr val="997929"/>
+                </a:solidFill>
+                <a:latin typeface="Times New Roman" pitchFamily="34" charset="0"/>
+                <a:ea typeface="Times New Roman" pitchFamily="34" charset="-122"/>
+                <a:cs typeface="Times New Roman" pitchFamily="34" charset="-120"/>
+              </a:rPr>
+              <a:t>Citation(s) used</a:t>
+            </a:r>
+            <a:endParaRPr lang="en-US" sz="1800" dirty="0"/>
+          </a:p>
+        </p:txBody>
+      </p:sp>
+      <p:sp>
+        <p:nvSpPr>
+          <p:cNvPr id="4" name="Text 2"/>
+          <p:cNvSpPr/>
+          <p:nvPr/>
+        </p:nvSpPr>
+        <p:spPr>
+          <a:xfrm>
+            <a:off x="634901" y="883593"/>
+            <a:ext cx="8102798" cy="769441"/>
+          </a:xfrm>
+          <a:prstGeom prst="rect">
+            <a:avLst/>
+          </a:prstGeom>
+          <a:noFill/>
+          <a:ln/>
+        </p:spPr>
+        <p:txBody>
+          <a:bodyPr wrap="square" lIns="0" tIns="0" rIns="0" bIns="0" rtlCol="0" anchor="t"/>
+          <a:lstStyle/>
+          <a:p>
+            <a:pPr algn="l" marL="342900" indent="-342900">
+              <a:lnSpc>
+                <a:spcPts val="1620"/>
+              </a:lnSpc>
+              <a:spcAft>
+                <a:spcPts val="300"/>
+              </a:spcAft>
+              <a:buSzPct val="100000"/>
+              <a:buChar char="•"/>
+            </a:pPr>
+            <a:r>
+              <a:rPr lang="en-US" sz="1200" dirty="0">
+                <a:solidFill>
+                  <a:srgbClr val="1A1A1A"/>
+                </a:solidFill>
+                <a:latin typeface="Georgia" pitchFamily="34" charset="0"/>
+                <a:ea typeface="Georgia" pitchFamily="34" charset="-122"/>
+                <a:cs typeface="Georgia" pitchFamily="34" charset="-120"/>
+              </a:rPr>
+              <a:t>Tirthaji (1965), Preface.</a:t>
+            </a:r>
+            <a:endParaRPr lang="en-US" sz="1200" dirty="0"/>
+          </a:p>
+          <a:p>
+            <a:pPr algn="l" marL="342900" indent="-342900">
+              <a:lnSpc>
+                <a:spcPts val="1620"/>
+              </a:lnSpc>
+              <a:spcAft>
+                <a:spcPts val="300"/>
+              </a:spcAft>
+              <a:buSzPct val="100000"/>
+              <a:buChar char="•"/>
+            </a:pPr>
+            <a:r>
+              <a:rPr lang="en-US" sz="1200" dirty="0">
+                <a:solidFill>
+                  <a:srgbClr val="1A1A1A"/>
+                </a:solidFill>
+                <a:latin typeface="Georgia" pitchFamily="34" charset="0"/>
+                <a:ea typeface="Georgia" pitchFamily="34" charset="-122"/>
+                <a:cs typeface="Georgia" pitchFamily="34" charset="-120"/>
+              </a:rPr>
+              <a:t>Dani (1993).</a:t>
+            </a:r>
+            <a:endParaRPr lang="en-US" sz="1200" dirty="0"/>
+          </a:p>
+          <a:p>
+            <a:pPr algn="l" marL="342900" indent="-342900">
+              <a:lnSpc>
+                <a:spcPts val="1620"/>
+              </a:lnSpc>
+              <a:spcAft>
+                <a:spcPts val="300"/>
+              </a:spcAft>
+              <a:buSzPct val="100000"/>
+              <a:buChar char="•"/>
+            </a:pPr>
+            <a:r>
+              <a:rPr lang="en-US" sz="1200" dirty="0">
+                <a:solidFill>
+                  <a:srgbClr val="1A1A1A"/>
+                </a:solidFill>
+                <a:latin typeface="Georgia" pitchFamily="34" charset="0"/>
+                <a:ea typeface="Georgia" pitchFamily="34" charset="-122"/>
+                <a:cs typeface="Georgia" pitchFamily="34" charset="-120"/>
+              </a:rPr>
+              <a:t>Plofker (2009) optional.</a:t>
             </a:r>
             <a:endParaRPr lang="en-US" sz="1200" dirty="0"/>
           </a:p>
@@ -2322,7 +2946,7 @@
                 <a:ea typeface="Times New Roman" pitchFamily="34" charset="-122"/>
                 <a:cs typeface="Times New Roman" pitchFamily="34" charset="-120"/>
               </a:rPr>
-              <a:t>Materials</a:t>
+              <a:t>Learning objective</a:t>
             </a:r>
             <a:endParaRPr lang="en-US" sz="1800" dirty="0"/>
           </a:p>
@@ -2370,7 +2994,7 @@
                 <a:ea typeface="Georgia" pitchFamily="34" charset="-122"/>
                 <a:cs typeface="Georgia" pitchFamily="34" charset="-120"/>
               </a:rPr>
-              <a:t>– Day 6 reading response in hand – Whiteboard</a:t>
+              <a:t>Students articulate and defend a labelling position with at least one citation and one steel-manned counter.</a:t>
             </a:r>
             <a:endParaRPr lang="en-US" sz="1200" dirty="0"/>
           </a:p>
@@ -2528,7 +3152,7 @@
                 <a:ea typeface="Times New Roman" pitchFamily="34" charset="-122"/>
                 <a:cs typeface="Times New Roman" pitchFamily="34" charset="-120"/>
               </a:rPr>
-              <a:t>Flow</a:t>
+              <a:t>Materials</a:t>
             </a:r>
             <a:endParaRPr lang="en-US" sz="1800" dirty="0"/>
           </a:p>
@@ -2537,6 +3161,76 @@
       <p:sp>
         <p:nvSpPr>
           <p:cNvPr id="4" name="Text 2"/>
+          <p:cNvSpPr/>
+          <p:nvPr/>
+        </p:nvSpPr>
+        <p:spPr>
+          <a:xfrm>
+            <a:off x="634901" y="883593"/>
+            <a:ext cx="8102798" cy="525661"/>
+          </a:xfrm>
+          <a:prstGeom prst="rect">
+            <a:avLst/>
+          </a:prstGeom>
+          <a:noFill/>
+          <a:ln/>
+        </p:spPr>
+        <p:txBody>
+          <a:bodyPr wrap="square" lIns="0" tIns="0" rIns="0" bIns="0" rtlCol="0" anchor="t"/>
+          <a:lstStyle/>
+          <a:p>
+            <a:pPr algn="l" marL="342900" indent="-342900">
+              <a:lnSpc>
+                <a:spcPts val="1620"/>
+              </a:lnSpc>
+              <a:spcAft>
+                <a:spcPts val="300"/>
+              </a:spcAft>
+              <a:buSzPct val="100000"/>
+              <a:buChar char="•"/>
+            </a:pPr>
+            <a:r>
+              <a:rPr lang="en-US" sz="1200" dirty="0">
+                <a:solidFill>
+                  <a:srgbClr val="1A1A1A"/>
+                </a:solidFill>
+                <a:latin typeface="Georgia" pitchFamily="34" charset="0"/>
+                <a:ea typeface="Georgia" pitchFamily="34" charset="-122"/>
+                <a:cs typeface="Georgia" pitchFamily="34" charset="-120"/>
+              </a:rPr>
+              <a:t>Day 6 reading response in hand</a:t>
+            </a:r>
+            <a:endParaRPr lang="en-US" sz="1200" dirty="0"/>
+          </a:p>
+          <a:p>
+            <a:pPr algn="l" marL="342900" indent="-342900">
+              <a:lnSpc>
+                <a:spcPts val="1620"/>
+              </a:lnSpc>
+              <a:spcAft>
+                <a:spcPts val="300"/>
+              </a:spcAft>
+              <a:buSzPct val="100000"/>
+              <a:buChar char="•"/>
+            </a:pPr>
+            <a:r>
+              <a:rPr lang="en-US" sz="1200" dirty="0">
+                <a:solidFill>
+                  <a:srgbClr val="1A1A1A"/>
+                </a:solidFill>
+                <a:latin typeface="Georgia" pitchFamily="34" charset="0"/>
+                <a:ea typeface="Georgia" pitchFamily="34" charset="-122"/>
+                <a:cs typeface="Georgia" pitchFamily="34" charset="-120"/>
+              </a:rPr>
+              <a:t>Whiteboard</a:t>
+            </a:r>
+            <a:endParaRPr lang="en-US" sz="1200" dirty="0"/>
+          </a:p>
+        </p:txBody>
+      </p:sp>
+      <p:sp>
+        <p:nvSpPr>
+          <p:cNvPr id="5" name="Text 3"/>
           <p:cNvSpPr/>
           <p:nvPr/>
         </p:nvSpPr>
@@ -2686,7 +3380,7 @@
                 <a:ea typeface="Times New Roman" pitchFamily="34" charset="-122"/>
                 <a:cs typeface="Times New Roman" pitchFamily="34" charset="-120"/>
               </a:rPr>
-              <a:t>Warm-up (3 min)</a:t>
+              <a:t>Flow</a:t>
             </a:r>
             <a:endParaRPr lang="en-US" sz="1800" dirty="0"/>
           </a:p>
@@ -2695,256 +3389,6 @@
       <p:sp>
         <p:nvSpPr>
           <p:cNvPr id="4" name="Text 2"/>
-          <p:cNvSpPr/>
-          <p:nvPr/>
-        </p:nvSpPr>
-        <p:spPr>
-          <a:xfrm>
-            <a:off x="406301" y="870942"/>
-            <a:ext cx="8498026" cy="213271"/>
-          </a:xfrm>
-          <a:prstGeom prst="rect">
-            <a:avLst/>
-          </a:prstGeom>
-          <a:noFill/>
-          <a:ln/>
-        </p:spPr>
-        <p:txBody>
-          <a:bodyPr wrap="square" lIns="0" tIns="0" rIns="0" bIns="0" rtlCol="0" anchor="t"/>
-          <a:lstStyle/>
-          <a:p>
-            <a:pPr algn="l" indent="0" marL="0">
-              <a:lnSpc>
-                <a:spcPts val="1680"/>
-              </a:lnSpc>
-              <a:spcBef>
-                <a:spcPts val="300"/>
-              </a:spcBef>
-              <a:spcAft>
-                <a:spcPts val="300"/>
-              </a:spcAft>
-              <a:buNone/>
-            </a:pPr>
-            <a:r>
-              <a:rPr lang="en-US" sz="1200" dirty="0">
-                <a:solidFill>
-                  <a:srgbClr val="1A1A1A"/>
-                </a:solidFill>
-                <a:latin typeface="Georgia" pitchFamily="34" charset="0"/>
-                <a:ea typeface="Georgia" pitchFamily="34" charset="-122"/>
-                <a:cs typeface="Georgia" pitchFamily="34" charset="-120"/>
-              </a:rPr>
-              <a:t>– Three positions on the board:</a:t>
-            </a:r>
-            <a:endParaRPr lang="en-US" sz="1200" dirty="0"/>
-          </a:p>
-        </p:txBody>
-      </p:sp>
-      <p:sp>
-        <p:nvSpPr>
-          <p:cNvPr id="5" name="Text 3"/>
-          <p:cNvSpPr/>
-          <p:nvPr/>
-        </p:nvSpPr>
-        <p:spPr>
-          <a:xfrm>
-            <a:off x="406301" y="1160413"/>
-            <a:ext cx="8498026" cy="213271"/>
-          </a:xfrm>
-          <a:prstGeom prst="rect">
-            <a:avLst/>
-          </a:prstGeom>
-          <a:noFill/>
-          <a:ln/>
-        </p:spPr>
-        <p:txBody>
-          <a:bodyPr wrap="square" lIns="0" tIns="0" rIns="0" bIns="0" rtlCol="0" anchor="t"/>
-          <a:lstStyle/>
-          <a:p>
-            <a:pPr algn="l" indent="0" marL="0">
-              <a:lnSpc>
-                <a:spcPts val="1680"/>
-              </a:lnSpc>
-              <a:spcBef>
-                <a:spcPts val="300"/>
-              </a:spcBef>
-              <a:spcAft>
-                <a:spcPts val="300"/>
-              </a:spcAft>
-              <a:buNone/>
-            </a:pPr>
-            <a:r>
-              <a:rPr lang="en-US" sz="1200" i="1" dirty="0">
-                <a:solidFill>
-                  <a:srgbClr val="1A1A1A"/>
-                </a:solidFill>
-                <a:latin typeface="Georgia" pitchFamily="34" charset="0"/>
-                <a:ea typeface="Georgia" pitchFamily="34" charset="-122"/>
-                <a:cs typeface="Georgia" pitchFamily="34" charset="-120"/>
-              </a:rPr>
-              <a:t>Each row: Position · One-line claim.</a:t>
-            </a:r>
-            <a:endParaRPr lang="en-US" sz="1200" dirty="0"/>
-          </a:p>
-        </p:txBody>
-      </p:sp>
-      <p:sp>
-        <p:nvSpPr>
-          <p:cNvPr id="6" name="Text 4"/>
-          <p:cNvSpPr/>
-          <p:nvPr/>
-        </p:nvSpPr>
-        <p:spPr>
-          <a:xfrm>
-            <a:off x="634901" y="1462534"/>
-            <a:ext cx="8102798" cy="769441"/>
-          </a:xfrm>
-          <a:prstGeom prst="rect">
-            <a:avLst/>
-          </a:prstGeom>
-          <a:noFill/>
-          <a:ln/>
-        </p:spPr>
-        <p:txBody>
-          <a:bodyPr wrap="square" lIns="0" tIns="0" rIns="0" bIns="0" rtlCol="0" anchor="t"/>
-          <a:lstStyle/>
-          <a:p>
-            <a:pPr algn="l" marL="342900" indent="-342900">
-              <a:lnSpc>
-                <a:spcPts val="1620"/>
-              </a:lnSpc>
-              <a:spcAft>
-                <a:spcPts val="300"/>
-              </a:spcAft>
-              <a:buSzPct val="100000"/>
-              <a:buChar char="•"/>
-            </a:pPr>
-            <a:r>
-              <a:rPr lang="en-US" sz="1200" b="1" dirty="0">
-                <a:solidFill>
-                  <a:srgbClr val="1A1A1A"/>
-                </a:solidFill>
-                <a:latin typeface="Georgia" pitchFamily="34" charset="0"/>
-                <a:ea typeface="Georgia" pitchFamily="34" charset="-122"/>
-                <a:cs typeface="Georgia" pitchFamily="34" charset="-120"/>
-              </a:rPr>
-              <a:t>A — Defend "Vedic"</a:t>
-            </a:r>
-            <a:pPr algn="l" indent="0" marL="0">
-              <a:lnSpc>
-                <a:spcPts val="1620"/>
-              </a:lnSpc>
-              <a:spcAft>
-                <a:spcPts val="300"/>
-              </a:spcAft>
-              <a:buNone/>
-            </a:pPr>
-            <a:r>
-              <a:rPr lang="en-US" sz="1200" dirty="0">
-                <a:solidFill>
-                  <a:srgbClr val="1A1A1A"/>
-                </a:solidFill>
-                <a:latin typeface="Georgia" pitchFamily="34" charset="0"/>
-                <a:ea typeface="Georgia" pitchFamily="34" charset="-122"/>
-                <a:cs typeface="Georgia" pitchFamily="34" charset="-120"/>
-              </a:rPr>
-              <a:t> — The label "Vedic mathematics" is appropriate; Tirthaji's attribution should be defended.</a:t>
-            </a:r>
-            <a:endParaRPr lang="en-US" sz="1200" dirty="0"/>
-          </a:p>
-          <a:p>
-            <a:pPr algn="l" marL="342900" indent="-342900">
-              <a:lnSpc>
-                <a:spcPts val="1620"/>
-              </a:lnSpc>
-              <a:spcAft>
-                <a:spcPts val="300"/>
-              </a:spcAft>
-              <a:buSzPct val="100000"/>
-              <a:buChar char="•"/>
-            </a:pPr>
-            <a:r>
-              <a:rPr lang="en-US" sz="1200" b="1" dirty="0">
-                <a:solidFill>
-                  <a:srgbClr val="1A1A1A"/>
-                </a:solidFill>
-                <a:latin typeface="Georgia" pitchFamily="34" charset="0"/>
-                <a:ea typeface="Georgia" pitchFamily="34" charset="-122"/>
-                <a:cs typeface="Georgia" pitchFamily="34" charset="-120"/>
-              </a:rPr>
-              <a:t>B — Drop "Vedic"</a:t>
-            </a:r>
-            <a:pPr algn="l" indent="0" marL="0">
-              <a:lnSpc>
-                <a:spcPts val="1620"/>
-              </a:lnSpc>
-              <a:spcAft>
-                <a:spcPts val="300"/>
-              </a:spcAft>
-              <a:buNone/>
-            </a:pPr>
-            <a:r>
-              <a:rPr lang="en-US" sz="1200" dirty="0">
-                <a:solidFill>
-                  <a:srgbClr val="1A1A1A"/>
-                </a:solidFill>
-                <a:latin typeface="Georgia" pitchFamily="34" charset="0"/>
-                <a:ea typeface="Georgia" pitchFamily="34" charset="-122"/>
-                <a:cs typeface="Georgia" pitchFamily="34" charset="-120"/>
-              </a:rPr>
-              <a:t> — The label is misleading; call it "Tirthaji's 16 sūtras" or "Indian mental arithmetic."</a:t>
-            </a:r>
-            <a:endParaRPr lang="en-US" sz="1200" dirty="0"/>
-          </a:p>
-          <a:p>
-            <a:pPr algn="l" marL="342900" indent="-342900">
-              <a:lnSpc>
-                <a:spcPts val="1620"/>
-              </a:lnSpc>
-              <a:spcAft>
-                <a:spcPts val="300"/>
-              </a:spcAft>
-              <a:buSzPct val="100000"/>
-              <a:buChar char="•"/>
-            </a:pPr>
-            <a:r>
-              <a:rPr lang="en-US" sz="1200" b="1" dirty="0">
-                <a:solidFill>
-                  <a:srgbClr val="1A1A1A"/>
-                </a:solidFill>
-                <a:latin typeface="Georgia" pitchFamily="34" charset="0"/>
-                <a:ea typeface="Georgia" pitchFamily="34" charset="-122"/>
-                <a:cs typeface="Georgia" pitchFamily="34" charset="-120"/>
-              </a:rPr>
-              <a:t>C — Keep "Vedic" with caveat</a:t>
-            </a:r>
-            <a:pPr algn="l" indent="0" marL="0">
-              <a:lnSpc>
-                <a:spcPts val="1620"/>
-              </a:lnSpc>
-              <a:spcAft>
-                <a:spcPts val="300"/>
-              </a:spcAft>
-              <a:buNone/>
-            </a:pPr>
-            <a:r>
-              <a:rPr lang="en-US" sz="1200" dirty="0">
-                <a:solidFill>
-                  <a:srgbClr val="1A1A1A"/>
-                </a:solidFill>
-                <a:latin typeface="Georgia" pitchFamily="34" charset="0"/>
-                <a:ea typeface="Georgia" pitchFamily="34" charset="-122"/>
-                <a:cs typeface="Georgia" pitchFamily="34" charset="-120"/>
-              </a:rPr>
-              <a:t> — Use Tirthaji's label but with a footnote noting the contested provenance.</a:t>
-            </a:r>
-            <a:endParaRPr lang="en-US" sz="1200" dirty="0"/>
-          </a:p>
-        </p:txBody>
-      </p:sp>
-      <p:sp>
-        <p:nvSpPr>
-          <p:cNvPr id="7" name="Text 5"/>
           <p:cNvSpPr/>
           <p:nvPr/>
         </p:nvSpPr>
@@ -3094,7 +3538,7 @@
                 <a:ea typeface="Times New Roman" pitchFamily="34" charset="-122"/>
                 <a:cs typeface="Times New Roman" pitchFamily="34" charset="-120"/>
               </a:rPr>
-              <a:t>Debate (30 min)</a:t>
+              <a:t>Warm-up (3 min)</a:t>
             </a:r>
             <a:endParaRPr lang="en-US" sz="1800" dirty="0"/>
           </a:p>
@@ -3108,8 +3552,8 @@
         </p:nvSpPr>
         <p:spPr>
           <a:xfrm>
-            <a:off x="406301" y="870942"/>
-            <a:ext cx="8498026" cy="426541"/>
+            <a:off x="634901" y="883593"/>
+            <a:ext cx="8102798" cy="281880"/>
           </a:xfrm>
           <a:prstGeom prst="rect">
             <a:avLst/>
@@ -3121,17 +3565,15 @@
           <a:bodyPr wrap="square" lIns="0" tIns="0" rIns="0" bIns="0" rtlCol="0" anchor="t"/>
           <a:lstStyle/>
           <a:p>
-            <a:pPr algn="l" indent="0" marL="0">
-              <a:lnSpc>
-                <a:spcPts val="1680"/>
-              </a:lnSpc>
-              <a:spcBef>
-                <a:spcPts val="300"/>
-              </a:spcBef>
-              <a:spcAft>
-                <a:spcPts val="300"/>
-              </a:spcAft>
-              <a:buNone/>
+            <a:pPr algn="l" marL="342900" indent="-342900">
+              <a:lnSpc>
+                <a:spcPts val="1620"/>
+              </a:lnSpc>
+              <a:spcAft>
+                <a:spcPts val="300"/>
+              </a:spcAft>
+              <a:buSzPct val="100000"/>
+              <a:buChar char="•"/>
             </a:pPr>
             <a:r>
               <a:rPr lang="en-US" sz="1200" dirty="0">
@@ -3142,7 +3584,7 @@
                 <a:ea typeface="Georgia" pitchFamily="34" charset="-122"/>
                 <a:cs typeface="Georgia" pitchFamily="34" charset="-120"/>
               </a:rPr>
-              <a:t>– 5 min: self-select into groups by position. – 10 min: groups prep — 2 main arguments + 1 steel-manned counter to each opposing position + 1 citation to use. – 12 min: structured debate (4 min per group). – 3 min: open floor cross-questions.</a:t>
+              <a:t>Three positions on the board:</a:t>
             </a:r>
             <a:endParaRPr lang="en-US" sz="1200" dirty="0"/>
           </a:p>
@@ -3151,6 +3593,54 @@
       <p:sp>
         <p:nvSpPr>
           <p:cNvPr id="5" name="Text 3"/>
+          <p:cNvSpPr/>
+          <p:nvPr/>
+        </p:nvSpPr>
+        <p:spPr>
+          <a:xfrm>
+            <a:off x="406301" y="1254323"/>
+            <a:ext cx="8498026" cy="213271"/>
+          </a:xfrm>
+          <a:prstGeom prst="rect">
+            <a:avLst/>
+          </a:prstGeom>
+          <a:noFill/>
+          <a:ln/>
+        </p:spPr>
+        <p:txBody>
+          <a:bodyPr wrap="square" lIns="0" tIns="0" rIns="0" bIns="0" rtlCol="0" anchor="t"/>
+          <a:lstStyle/>
+          <a:p>
+            <a:pPr algn="l" indent="0" marL="0">
+              <a:lnSpc>
+                <a:spcPts val="1680"/>
+              </a:lnSpc>
+              <a:spcBef>
+                <a:spcPts val="300"/>
+              </a:spcBef>
+              <a:spcAft>
+                <a:spcPts val="300"/>
+              </a:spcAft>
+              <a:buNone/>
+            </a:pPr>
+            <a:r>
+              <a:rPr lang="en-US" sz="1200" i="1" dirty="0">
+                <a:solidFill>
+                  <a:srgbClr val="1A1A1A"/>
+                </a:solidFill>
+                <a:latin typeface="Georgia" pitchFamily="34" charset="0"/>
+                <a:ea typeface="Georgia" pitchFamily="34" charset="-122"/>
+                <a:cs typeface="Georgia" pitchFamily="34" charset="-120"/>
+              </a:rPr>
+              <a:t>Each row: Position · One-line claim.</a:t>
+            </a:r>
+            <a:endParaRPr lang="en-US" sz="1200" dirty="0"/>
+          </a:p>
+        </p:txBody>
+      </p:sp>
+      <p:sp>
+        <p:nvSpPr>
+          <p:cNvPr id="6" name="Text 4"/>
           <p:cNvSpPr/>
           <p:nvPr/>
         </p:nvSpPr>
@@ -3300,7 +3790,7 @@
                 <a:ea typeface="Times New Roman" pitchFamily="34" charset="-122"/>
                 <a:cs typeface="Times New Roman" pitchFamily="34" charset="-120"/>
               </a:rPr>
-              <a:t>Oral assessment (during debate)</a:t>
+              <a:t>Warm-up (3 min) (cont.)</a:t>
             </a:r>
             <a:endParaRPr lang="en-US" sz="1800" dirty="0"/>
           </a:p>
@@ -3314,8 +3804,8 @@
         </p:nvSpPr>
         <p:spPr>
           <a:xfrm>
-            <a:off x="406301" y="870942"/>
-            <a:ext cx="8498026" cy="213271"/>
+            <a:off x="634901" y="883593"/>
+            <a:ext cx="8102798" cy="769441"/>
           </a:xfrm>
           <a:prstGeom prst="rect">
             <a:avLst/>
@@ -3327,20 +3817,18 @@
           <a:bodyPr wrap="square" lIns="0" tIns="0" rIns="0" bIns="0" rtlCol="0" anchor="t"/>
           <a:lstStyle/>
           <a:p>
-            <a:pPr algn="l" indent="0" marL="0">
-              <a:lnSpc>
-                <a:spcPts val="1680"/>
-              </a:lnSpc>
-              <a:spcBef>
-                <a:spcPts val="300"/>
-              </a:spcBef>
-              <a:spcAft>
-                <a:spcPts val="300"/>
-              </a:spcAft>
-              <a:buNone/>
-            </a:pPr>
-            <a:r>
-              <a:rPr lang="en-US" sz="1200" dirty="0">
+            <a:pPr algn="l" marL="342900" indent="-342900">
+              <a:lnSpc>
+                <a:spcPts val="1620"/>
+              </a:lnSpc>
+              <a:spcAft>
+                <a:spcPts val="300"/>
+              </a:spcAft>
+              <a:buSzPct val="100000"/>
+              <a:buChar char="•"/>
+            </a:pPr>
+            <a:r>
+              <a:rPr lang="en-US" sz="1200" b="1" dirty="0">
                 <a:solidFill>
                   <a:srgbClr val="1A1A1A"/>
                 </a:solidFill>
@@ -3348,7 +3836,115 @@
                 <a:ea typeface="Georgia" pitchFamily="34" charset="-122"/>
                 <a:cs typeface="Georgia" pitchFamily="34" charset="-120"/>
               </a:rPr>
-              <a:t>Teacher uses same rubric as Module 2 Senior Day 7 — positions, evidence, counter-argument, listening.</a:t>
+              <a:t>A — Defend "Vedic"</a:t>
+            </a:r>
+            <a:pPr algn="l" indent="0" marL="0">
+              <a:lnSpc>
+                <a:spcPts val="1620"/>
+              </a:lnSpc>
+              <a:spcAft>
+                <a:spcPts val="300"/>
+              </a:spcAft>
+              <a:buNone/>
+            </a:pPr>
+            <a:r>
+              <a:rPr lang="en-US" sz="1200" dirty="0">
+                <a:solidFill>
+                  <a:srgbClr val="1A1A1A"/>
+                </a:solidFill>
+                <a:latin typeface="Georgia" pitchFamily="34" charset="0"/>
+                <a:ea typeface="Georgia" pitchFamily="34" charset="-122"/>
+                <a:cs typeface="Georgia" pitchFamily="34" charset="-120"/>
+              </a:rPr>
+              <a:t> — The label "Vedic mathematics" is appropriate; Tirthaji's attribution should be defended.</a:t>
+            </a:r>
+            <a:endParaRPr lang="en-US" sz="1200" dirty="0"/>
+          </a:p>
+          <a:p>
+            <a:pPr algn="l" marL="342900" indent="-342900">
+              <a:lnSpc>
+                <a:spcPts val="1620"/>
+              </a:lnSpc>
+              <a:spcAft>
+                <a:spcPts val="300"/>
+              </a:spcAft>
+              <a:buSzPct val="100000"/>
+              <a:buChar char="•"/>
+            </a:pPr>
+            <a:r>
+              <a:rPr lang="en-US" sz="1200" b="1" dirty="0">
+                <a:solidFill>
+                  <a:srgbClr val="1A1A1A"/>
+                </a:solidFill>
+                <a:latin typeface="Georgia" pitchFamily="34" charset="0"/>
+                <a:ea typeface="Georgia" pitchFamily="34" charset="-122"/>
+                <a:cs typeface="Georgia" pitchFamily="34" charset="-120"/>
+              </a:rPr>
+              <a:t>B — Drop "Vedic"</a:t>
+            </a:r>
+            <a:pPr algn="l" indent="0" marL="0">
+              <a:lnSpc>
+                <a:spcPts val="1620"/>
+              </a:lnSpc>
+              <a:spcAft>
+                <a:spcPts val="300"/>
+              </a:spcAft>
+              <a:buNone/>
+            </a:pPr>
+            <a:r>
+              <a:rPr lang="en-US" sz="1200" dirty="0">
+                <a:solidFill>
+                  <a:srgbClr val="1A1A1A"/>
+                </a:solidFill>
+                <a:latin typeface="Georgia" pitchFamily="34" charset="0"/>
+                <a:ea typeface="Georgia" pitchFamily="34" charset="-122"/>
+                <a:cs typeface="Georgia" pitchFamily="34" charset="-120"/>
+              </a:rPr>
+              <a:t> — The label is misleading; call it "Tirthaji's 16 sūtras" or "Indian mental arithmetic."</a:t>
+            </a:r>
+            <a:endParaRPr lang="en-US" sz="1200" dirty="0"/>
+          </a:p>
+          <a:p>
+            <a:pPr algn="l" marL="342900" indent="-342900">
+              <a:lnSpc>
+                <a:spcPts val="1620"/>
+              </a:lnSpc>
+              <a:spcAft>
+                <a:spcPts val="300"/>
+              </a:spcAft>
+              <a:buSzPct val="100000"/>
+              <a:buChar char="•"/>
+            </a:pPr>
+            <a:r>
+              <a:rPr lang="en-US" sz="1200" b="1" dirty="0">
+                <a:solidFill>
+                  <a:srgbClr val="1A1A1A"/>
+                </a:solidFill>
+                <a:latin typeface="Georgia" pitchFamily="34" charset="0"/>
+                <a:ea typeface="Georgia" pitchFamily="34" charset="-122"/>
+                <a:cs typeface="Georgia" pitchFamily="34" charset="-120"/>
+              </a:rPr>
+              <a:t>C — Keep "Vedic" with caveat</a:t>
+            </a:r>
+            <a:pPr algn="l" indent="0" marL="0">
+              <a:lnSpc>
+                <a:spcPts val="1620"/>
+              </a:lnSpc>
+              <a:spcAft>
+                <a:spcPts val="300"/>
+              </a:spcAft>
+              <a:buNone/>
+            </a:pPr>
+            <a:r>
+              <a:rPr lang="en-US" sz="1200" dirty="0">
+                <a:solidFill>
+                  <a:srgbClr val="1A1A1A"/>
+                </a:solidFill>
+                <a:latin typeface="Georgia" pitchFamily="34" charset="0"/>
+                <a:ea typeface="Georgia" pitchFamily="34" charset="-122"/>
+                <a:cs typeface="Georgia" pitchFamily="34" charset="-120"/>
+              </a:rPr>
+              <a:t> — Use Tirthaji's label but with a footnote noting the contested provenance.</a:t>
             </a:r>
             <a:endParaRPr lang="en-US" sz="1200" dirty="0"/>
           </a:p>
@@ -3506,7 +4102,7 @@
                 <a:ea typeface="Times New Roman" pitchFamily="34" charset="-122"/>
                 <a:cs typeface="Times New Roman" pitchFamily="34" charset="-120"/>
               </a:rPr>
-              <a:t>Wrap-up (7 min)</a:t>
+              <a:t>Debate (30 min)</a:t>
             </a:r>
             <a:endParaRPr lang="en-US" sz="1800" dirty="0"/>
           </a:p>
@@ -3520,8 +4116,8 @@
         </p:nvSpPr>
         <p:spPr>
           <a:xfrm>
-            <a:off x="406301" y="870942"/>
-            <a:ext cx="8498026" cy="639812"/>
+            <a:off x="634901" y="883593"/>
+            <a:ext cx="8102798" cy="1013222"/>
           </a:xfrm>
           <a:prstGeom prst="rect">
             <a:avLst/>
@@ -3533,17 +4129,15 @@
           <a:bodyPr wrap="square" lIns="0" tIns="0" rIns="0" bIns="0" rtlCol="0" anchor="t"/>
           <a:lstStyle/>
           <a:p>
-            <a:pPr algn="l" indent="0" marL="0">
-              <a:lnSpc>
-                <a:spcPts val="1680"/>
-              </a:lnSpc>
-              <a:spcBef>
-                <a:spcPts val="300"/>
-              </a:spcBef>
-              <a:spcAft>
-                <a:spcPts val="300"/>
-              </a:spcAft>
-              <a:buNone/>
+            <a:pPr algn="l" marL="342900" indent="-342900">
+              <a:lnSpc>
+                <a:spcPts val="1620"/>
+              </a:lnSpc>
+              <a:spcAft>
+                <a:spcPts val="300"/>
+              </a:spcAft>
+              <a:buSzPct val="100000"/>
+              <a:buChar char="•"/>
             </a:pPr>
             <a:r>
               <a:rPr lang="en-US" sz="1200" dirty="0">
@@ -3554,22 +4148,23 @@
                 <a:ea typeface="Georgia" pitchFamily="34" charset="-122"/>
                 <a:cs typeface="Georgia" pitchFamily="34" charset="-120"/>
               </a:rPr>
-              <a:t>– 3 student reflections: did anyone's position shift? – Note: </a:t>
-            </a:r>
-            <a:pPr algn="l" indent="0" marL="0">
-              <a:lnSpc>
-                <a:spcPts val="1680"/>
-              </a:lnSpc>
-              <a:spcBef>
-                <a:spcPts val="300"/>
-              </a:spcBef>
-              <a:spcAft>
-                <a:spcPts val="300"/>
-              </a:spcAft>
-              <a:buNone/>
-            </a:pPr>
-            <a:r>
-              <a:rPr lang="en-US" sz="1200" i="1" dirty="0">
+              <a:t>5 min: self-select into groups by position.</a:t>
+            </a:r>
+            <a:endParaRPr lang="en-US" sz="1200" dirty="0"/>
+          </a:p>
+          <a:p>
+            <a:pPr algn="l" marL="342900" indent="-342900">
+              <a:lnSpc>
+                <a:spcPts val="1620"/>
+              </a:lnSpc>
+              <a:spcAft>
+                <a:spcPts val="300"/>
+              </a:spcAft>
+              <a:buSzPct val="100000"/>
+              <a:buChar char="•"/>
+            </a:pPr>
+            <a:r>
+              <a:rPr lang="en-US" sz="1200" dirty="0">
                 <a:solidFill>
                   <a:srgbClr val="1A1A1A"/>
                 </a:solidFill>
@@ -3577,7 +4172,55 @@
                 <a:ea typeface="Georgia" pitchFamily="34" charset="-122"/>
                 <a:cs typeface="Georgia" pitchFamily="34" charset="-120"/>
               </a:rPr>
-              <a:t>"You don't have to commit to a position tonight. But by Day 8, you'll choose a paper topic, and the position you defend in the paper might be different from the one you defended today. That's OK."</a:t>
+              <a:t>10 min: groups prep — 2 main arguments + 1 steel-manned counter to each opposing position + 1 citation to use.</a:t>
+            </a:r>
+            <a:endParaRPr lang="en-US" sz="1200" dirty="0"/>
+          </a:p>
+          <a:p>
+            <a:pPr algn="l" marL="342900" indent="-342900">
+              <a:lnSpc>
+                <a:spcPts val="1620"/>
+              </a:lnSpc>
+              <a:spcAft>
+                <a:spcPts val="300"/>
+              </a:spcAft>
+              <a:buSzPct val="100000"/>
+              <a:buChar char="•"/>
+            </a:pPr>
+            <a:r>
+              <a:rPr lang="en-US" sz="1200" dirty="0">
+                <a:solidFill>
+                  <a:srgbClr val="1A1A1A"/>
+                </a:solidFill>
+                <a:latin typeface="Georgia" pitchFamily="34" charset="0"/>
+                <a:ea typeface="Georgia" pitchFamily="34" charset="-122"/>
+                <a:cs typeface="Georgia" pitchFamily="34" charset="-120"/>
+              </a:rPr>
+              <a:t>12 min: structured debate (4 min per group).</a:t>
+            </a:r>
+            <a:endParaRPr lang="en-US" sz="1200" dirty="0"/>
+          </a:p>
+          <a:p>
+            <a:pPr algn="l" marL="342900" indent="-342900">
+              <a:lnSpc>
+                <a:spcPts val="1620"/>
+              </a:lnSpc>
+              <a:spcAft>
+                <a:spcPts val="300"/>
+              </a:spcAft>
+              <a:buSzPct val="100000"/>
+              <a:buChar char="•"/>
+            </a:pPr>
+            <a:r>
+              <a:rPr lang="en-US" sz="1200" dirty="0">
+                <a:solidFill>
+                  <a:srgbClr val="1A1A1A"/>
+                </a:solidFill>
+                <a:latin typeface="Georgia" pitchFamily="34" charset="0"/>
+                <a:ea typeface="Georgia" pitchFamily="34" charset="-122"/>
+                <a:cs typeface="Georgia" pitchFamily="34" charset="-120"/>
+              </a:rPr>
+              <a:t>3 min: open floor cross-questions.</a:t>
             </a:r>
             <a:endParaRPr lang="en-US" sz="1200" dirty="0"/>
           </a:p>
@@ -3735,7 +4378,7 @@
                 <a:ea typeface="Times New Roman" pitchFamily="34" charset="-122"/>
                 <a:cs typeface="Times New Roman" pitchFamily="34" charset="-120"/>
               </a:rPr>
-              <a:t>Differentiation</a:t>
+              <a:t>Oral assessment (during debate)</a:t>
             </a:r>
             <a:endParaRPr lang="en-US" sz="1800" dirty="0"/>
           </a:p>
@@ -3749,8 +4392,8 @@
         </p:nvSpPr>
         <p:spPr>
           <a:xfrm>
-            <a:off x="634901" y="883593"/>
-            <a:ext cx="8102798" cy="525661"/>
+            <a:off x="406301" y="870942"/>
+            <a:ext cx="8498026" cy="213271"/>
           </a:xfrm>
           <a:prstGeom prst="rect">
             <a:avLst/>
@@ -3762,18 +4405,20 @@
           <a:bodyPr wrap="square" lIns="0" tIns="0" rIns="0" bIns="0" rtlCol="0" anchor="t"/>
           <a:lstStyle/>
           <a:p>
-            <a:pPr algn="l" marL="342900" indent="-342900">
-              <a:lnSpc>
-                <a:spcPts val="1620"/>
-              </a:lnSpc>
-              <a:spcAft>
-                <a:spcPts val="300"/>
-              </a:spcAft>
-              <a:buSzPct val="100000"/>
-              <a:buChar char="•"/>
-            </a:pPr>
-            <a:r>
-              <a:rPr lang="en-US" sz="1200" b="1" dirty="0">
+            <a:pPr algn="l" indent="0" marL="0">
+              <a:lnSpc>
+                <a:spcPts val="1680"/>
+              </a:lnSpc>
+              <a:spcBef>
+                <a:spcPts val="300"/>
+              </a:spcBef>
+              <a:spcAft>
+                <a:spcPts val="300"/>
+              </a:spcAft>
+              <a:buNone/>
+            </a:pPr>
+            <a:r>
+              <a:rPr lang="en-US" sz="1200" dirty="0">
                 <a:solidFill>
                   <a:srgbClr val="1A1A1A"/>
                 </a:solidFill>
@@ -3781,71 +4426,7 @@
                 <a:ea typeface="Georgia" pitchFamily="34" charset="-122"/>
                 <a:cs typeface="Georgia" pitchFamily="34" charset="-120"/>
               </a:rPr>
-              <a:t>Tier up:</a:t>
-            </a:r>
-            <a:pPr algn="l" indent="0" marL="0">
-              <a:lnSpc>
-                <a:spcPts val="1620"/>
-              </a:lnSpc>
-              <a:spcAft>
-                <a:spcPts val="300"/>
-              </a:spcAft>
-              <a:buNone/>
-            </a:pPr>
-            <a:r>
-              <a:rPr lang="en-US" sz="1200" dirty="0">
-                <a:solidFill>
-                  <a:srgbClr val="1A1A1A"/>
-                </a:solidFill>
-                <a:latin typeface="Georgia" pitchFamily="34" charset="0"/>
-                <a:ea typeface="Georgia" pitchFamily="34" charset="-122"/>
-                <a:cs typeface="Georgia" pitchFamily="34" charset="-120"/>
-              </a:rPr>
-              <a:t> Take a position you DON'T agree with. Defend it.</a:t>
-            </a:r>
-            <a:endParaRPr lang="en-US" sz="1200" dirty="0"/>
-          </a:p>
-          <a:p>
-            <a:pPr algn="l" marL="342900" indent="-342900">
-              <a:lnSpc>
-                <a:spcPts val="1620"/>
-              </a:lnSpc>
-              <a:spcAft>
-                <a:spcPts val="300"/>
-              </a:spcAft>
-              <a:buSzPct val="100000"/>
-              <a:buChar char="•"/>
-            </a:pPr>
-            <a:r>
-              <a:rPr lang="en-US" sz="1200" b="1" dirty="0">
-                <a:solidFill>
-                  <a:srgbClr val="1A1A1A"/>
-                </a:solidFill>
-                <a:latin typeface="Georgia" pitchFamily="34" charset="0"/>
-                <a:ea typeface="Georgia" pitchFamily="34" charset="-122"/>
-                <a:cs typeface="Georgia" pitchFamily="34" charset="-120"/>
-              </a:rPr>
-              <a:t>Tier down:</a:t>
-            </a:r>
-            <a:pPr algn="l" indent="0" marL="0">
-              <a:lnSpc>
-                <a:spcPts val="1620"/>
-              </a:lnSpc>
-              <a:spcAft>
-                <a:spcPts val="300"/>
-              </a:spcAft>
-              <a:buNone/>
-            </a:pPr>
-            <a:r>
-              <a:rPr lang="en-US" sz="1200" dirty="0">
-                <a:solidFill>
-                  <a:srgbClr val="1A1A1A"/>
-                </a:solidFill>
-                <a:latin typeface="Georgia" pitchFamily="34" charset="0"/>
-                <a:ea typeface="Georgia" pitchFamily="34" charset="-122"/>
-                <a:cs typeface="Georgia" pitchFamily="34" charset="-120"/>
-              </a:rPr>
-              <a:t> Use your Day 6 reading response as your speaking notes.</a:t>
+              <a:t>Teacher uses same rubric as Module 2 Senior Day 7 — positions, evidence, counter-argument, listening.</a:t>
             </a:r>
             <a:endParaRPr lang="en-US" sz="1200" dirty="0"/>
           </a:p>
@@ -4003,7 +4584,7 @@
                 <a:ea typeface="Times New Roman" pitchFamily="34" charset="-122"/>
                 <a:cs typeface="Times New Roman" pitchFamily="34" charset="-120"/>
               </a:rPr>
-              <a:t>Teacher notes</a:t>
+              <a:t>Wrap-up (7 min)</a:t>
             </a:r>
             <a:endParaRPr lang="en-US" sz="1800" dirty="0"/>
           </a:p>
@@ -4017,8 +4598,8 @@
         </p:nvSpPr>
         <p:spPr>
           <a:xfrm>
-            <a:off x="406301" y="870942"/>
-            <a:ext cx="8498026" cy="639812"/>
+            <a:off x="634901" y="883593"/>
+            <a:ext cx="8102798" cy="731341"/>
           </a:xfrm>
           <a:prstGeom prst="rect">
             <a:avLst/>
@@ -4030,17 +4611,15 @@
           <a:bodyPr wrap="square" lIns="0" tIns="0" rIns="0" bIns="0" rtlCol="0" anchor="t"/>
           <a:lstStyle/>
           <a:p>
-            <a:pPr algn="l" indent="0" marL="0">
-              <a:lnSpc>
-                <a:spcPts val="1680"/>
-              </a:lnSpc>
-              <a:spcBef>
-                <a:spcPts val="300"/>
-              </a:spcBef>
-              <a:spcAft>
-                <a:spcPts val="300"/>
-              </a:spcAft>
-              <a:buNone/>
+            <a:pPr algn="l" marL="342900" indent="-342900">
+              <a:lnSpc>
+                <a:spcPts val="1620"/>
+              </a:lnSpc>
+              <a:spcAft>
+                <a:spcPts val="300"/>
+              </a:spcAft>
+              <a:buSzPct val="100000"/>
+              <a:buChar char="•"/>
             </a:pPr>
             <a:r>
               <a:rPr lang="en-US" sz="1200" dirty="0">
@@ -4051,7 +4630,51 @@
                 <a:ea typeface="Georgia" pitchFamily="34" charset="-122"/>
                 <a:cs typeface="Georgia" pitchFamily="34" charset="-120"/>
               </a:rPr>
-              <a:t>– This debate is more politically loaded than the Module 2 debate. Some students' families have strong feelings. Model respect. – The "Position C" hybrid is often the strongest scholarly position — but defend it on its merits, not as a compromise.</a:t>
+              <a:t>3 student reflections: did anyone's position shift?</a:t>
+            </a:r>
+            <a:endParaRPr lang="en-US" sz="1200" dirty="0"/>
+          </a:p>
+          <a:p>
+            <a:pPr algn="l" marL="342900" indent="-342900">
+              <a:lnSpc>
+                <a:spcPts val="1620"/>
+              </a:lnSpc>
+              <a:spcAft>
+                <a:spcPts val="300"/>
+              </a:spcAft>
+              <a:buSzPct val="100000"/>
+              <a:buChar char="•"/>
+            </a:pPr>
+            <a:r>
+              <a:rPr lang="en-US" sz="1200" dirty="0">
+                <a:solidFill>
+                  <a:srgbClr val="1A1A1A"/>
+                </a:solidFill>
+                <a:latin typeface="Georgia" pitchFamily="34" charset="0"/>
+                <a:ea typeface="Georgia" pitchFamily="34" charset="-122"/>
+                <a:cs typeface="Georgia" pitchFamily="34" charset="-120"/>
+              </a:rPr>
+              <a:t>Note: </a:t>
+            </a:r>
+            <a:pPr algn="l" indent="0" marL="0">
+              <a:lnSpc>
+                <a:spcPts val="1620"/>
+              </a:lnSpc>
+              <a:spcAft>
+                <a:spcPts val="300"/>
+              </a:spcAft>
+              <a:buNone/>
+            </a:pPr>
+            <a:r>
+              <a:rPr lang="en-US" sz="1200" i="1" dirty="0">
+                <a:solidFill>
+                  <a:srgbClr val="1A1A1A"/>
+                </a:solidFill>
+                <a:latin typeface="Georgia" pitchFamily="34" charset="0"/>
+                <a:ea typeface="Georgia" pitchFamily="34" charset="-122"/>
+                <a:cs typeface="Georgia" pitchFamily="34" charset="-120"/>
+              </a:rPr>
+              <a:t>"You don't have to commit to a position tonight. But by Day 8, you'll choose a paper topic, and the position you defend in the paper might be different from the one you defended today. That's OK."</a:t>
             </a:r>
             <a:endParaRPr lang="en-US" sz="1200" dirty="0"/>
           </a:p>
